--- a/agent-first-meeting/templates/default.pptx
+++ b/agent-first-meeting/templates/default.pptx
@@ -123,6 +123,50 @@
       </p:grpSpPr>
       <p:sp>
         <p:nvSpPr>
+          <p:cNvPr id="9002" name="Band9002"/>
+          <p:cNvSpPr/>
+          <p:nvPr/>
+        </p:nvSpPr>
+        <p:spPr>
+          <a:xfrm>
+            <a:off x="0" y="5687568"/>
+            <a:ext cx="9144000" cy="73152"/>
+          </a:xfrm>
+          <a:prstGeom prst="rect">
+            <a:avLst/>
+          </a:prstGeom>
+          <a:solidFill>
+            <a:srgbClr val="5DADE2"/>
+          </a:solidFill>
+          <a:ln>
+            <a:noFill/>
+          </a:ln>
+        </p:spPr>
+      </p:sp>
+      <p:sp>
+        <p:nvSpPr>
+          <p:cNvPr id="9001" name="Band9001"/>
+          <p:cNvSpPr/>
+          <p:nvPr/>
+        </p:nvSpPr>
+        <p:spPr>
+          <a:xfrm>
+            <a:off x="0" y="5760720"/>
+            <a:ext cx="9144000" cy="1097280"/>
+          </a:xfrm>
+          <a:prstGeom prst="rect">
+            <a:avLst/>
+          </a:prstGeom>
+          <a:solidFill>
+            <a:srgbClr val="2C3E50"/>
+          </a:solidFill>
+          <a:ln>
+            <a:noFill/>
+          </a:ln>
+        </p:spPr>
+      </p:sp>
+      <p:sp>
+        <p:nvSpPr>
           <p:cNvPr id="2" name="Title 1"/>
           <p:cNvSpPr>
             <a:spLocks noGrp="1"/>
@@ -713,6 +757,28 @@
           <a:chExt cx="0" cy="0"/>
         </a:xfrm>
       </p:grpSpPr>
+      <p:sp>
+        <p:nvSpPr>
+          <p:cNvPr id="9101" name="Band9101"/>
+          <p:cNvSpPr/>
+          <p:nvPr/>
+        </p:nvSpPr>
+        <p:spPr>
+          <a:xfrm>
+            <a:off x="0" y="0"/>
+            <a:ext cx="9144000" cy="73152"/>
+          </a:xfrm>
+          <a:prstGeom prst="rect">
+            <a:avLst/>
+          </a:prstGeom>
+          <a:solidFill>
+            <a:srgbClr val="5DADE2"/>
+          </a:solidFill>
+          <a:ln>
+            <a:noFill/>
+          </a:ln>
+        </p:spPr>
+      </p:sp>
       <p:sp>
         <p:nvSpPr>
           <p:cNvPr id="2" name="Title 1"/>
